--- a/topic04-functions-and-lambda-calculus/unit-04a-lectures/talk-3/c-first-class.pptx
+++ b/topic04-functions-and-lambda-calculus/unit-04a-lectures/talk-3/c-first-class.pptx
@@ -1119,7 +1119,7 @@
           <a:p>
             <a:fld id="{48A87A34-81AB-432B-8DAE-1953F412C126}" type="datetimeFigureOut">
               <a:rPr lang="en-US" smtClean="0"/>
-              <a:t>1/29/26</a:t>
+              <a:t>2/5/26</a:t>
             </a:fld>
             <a:endParaRPr lang="en-US" dirty="0"/>
           </a:p>
@@ -1541,7 +1541,7 @@
             <a:fld id="{48A87A34-81AB-432B-8DAE-1953F412C126}" type="datetimeFigureOut">
               <a:rPr lang="en-US" smtClean="0"/>
               <a:pPr/>
-              <a:t>1/29/26</a:t>
+              <a:t>2/5/26</a:t>
             </a:fld>
             <a:endParaRPr lang="en-US" dirty="0"/>
           </a:p>
@@ -1885,7 +1885,7 @@
             <a:fld id="{48A87A34-81AB-432B-8DAE-1953F412C126}" type="datetimeFigureOut">
               <a:rPr lang="en-US" smtClean="0"/>
               <a:pPr/>
-              <a:t>1/29/26</a:t>
+              <a:t>2/5/26</a:t>
             </a:fld>
             <a:endParaRPr lang="en-US" dirty="0"/>
           </a:p>
@@ -2298,7 +2298,7 @@
             <a:fld id="{48A87A34-81AB-432B-8DAE-1953F412C126}" type="datetimeFigureOut">
               <a:rPr lang="en-US" smtClean="0"/>
               <a:pPr/>
-              <a:t>1/29/26</a:t>
+              <a:t>2/5/26</a:t>
             </a:fld>
             <a:endParaRPr lang="en-US" dirty="0"/>
           </a:p>
@@ -2874,7 +2874,7 @@
             <a:fld id="{48A87A34-81AB-432B-8DAE-1953F412C126}" type="datetimeFigureOut">
               <a:rPr lang="en-US" smtClean="0"/>
               <a:pPr/>
-              <a:t>1/29/26</a:t>
+              <a:t>2/5/26</a:t>
             </a:fld>
             <a:endParaRPr lang="en-US" dirty="0"/>
           </a:p>
@@ -3563,7 +3563,7 @@
             <a:fld id="{48A87A34-81AB-432B-8DAE-1953F412C126}" type="datetimeFigureOut">
               <a:rPr lang="en-US" smtClean="0"/>
               <a:pPr/>
-              <a:t>1/29/26</a:t>
+              <a:t>2/5/26</a:t>
             </a:fld>
             <a:endParaRPr lang="en-US" dirty="0"/>
           </a:p>
@@ -4484,7 +4484,7 @@
             <a:fld id="{48A87A34-81AB-432B-8DAE-1953F412C126}" type="datetimeFigureOut">
               <a:rPr lang="en-US" smtClean="0"/>
               <a:pPr/>
-              <a:t>1/29/26</a:t>
+              <a:t>2/5/26</a:t>
             </a:fld>
             <a:endParaRPr lang="en-US" dirty="0"/>
           </a:p>
@@ -4804,7 +4804,7 @@
           <a:p>
             <a:fld id="{48A87A34-81AB-432B-8DAE-1953F412C126}" type="datetimeFigureOut">
               <a:rPr lang="en-US" smtClean="0"/>
-              <a:t>1/29/26</a:t>
+              <a:t>2/5/26</a:t>
             </a:fld>
             <a:endParaRPr lang="en-US" dirty="0"/>
           </a:p>
@@ -5074,7 +5074,7 @@
           <a:p>
             <a:fld id="{48A87A34-81AB-432B-8DAE-1953F412C126}" type="datetimeFigureOut">
               <a:rPr lang="en-US" smtClean="0"/>
-              <a:t>1/29/26</a:t>
+              <a:t>2/5/26</a:t>
             </a:fld>
             <a:endParaRPr lang="en-US" dirty="0"/>
           </a:p>
@@ -5403,7 +5403,7 @@
           <a:p>
             <a:fld id="{48A87A34-81AB-432B-8DAE-1953F412C126}" type="datetimeFigureOut">
               <a:rPr lang="en-US" smtClean="0"/>
-              <a:t>1/29/26</a:t>
+              <a:t>2/5/26</a:t>
             </a:fld>
             <a:endParaRPr lang="en-US" dirty="0"/>
           </a:p>
@@ -5798,7 +5798,7 @@
           <a:p>
             <a:fld id="{48A87A34-81AB-432B-8DAE-1953F412C126}" type="datetimeFigureOut">
               <a:rPr lang="en-US" smtClean="0"/>
-              <a:t>1/29/26</a:t>
+              <a:t>2/5/26</a:t>
             </a:fld>
             <a:endParaRPr lang="en-US" dirty="0"/>
           </a:p>
@@ -6194,7 +6194,7 @@
           <a:p>
             <a:fld id="{48A87A34-81AB-432B-8DAE-1953F412C126}" type="datetimeFigureOut">
               <a:rPr lang="en-US" smtClean="0"/>
-              <a:t>1/29/26</a:t>
+              <a:t>2/5/26</a:t>
             </a:fld>
             <a:endParaRPr lang="en-US" dirty="0"/>
           </a:p>
@@ -6707,7 +6707,7 @@
             <a:fld id="{48A87A34-81AB-432B-8DAE-1953F412C126}" type="datetimeFigureOut">
               <a:rPr lang="en-US" smtClean="0"/>
               <a:pPr/>
-              <a:t>1/29/26</a:t>
+              <a:t>2/5/26</a:t>
             </a:fld>
             <a:endParaRPr lang="en-US" dirty="0"/>
           </a:p>
@@ -6985,7 +6985,7 @@
           <a:p>
             <a:fld id="{48A87A34-81AB-432B-8DAE-1953F412C126}" type="datetimeFigureOut">
               <a:rPr lang="en-US" smtClean="0"/>
-              <a:t>1/29/26</a:t>
+              <a:t>2/5/26</a:t>
             </a:fld>
             <a:endParaRPr lang="en-US" dirty="0"/>
           </a:p>
@@ -7161,7 +7161,7 @@
           <a:p>
             <a:fld id="{48A87A34-81AB-432B-8DAE-1953F412C126}" type="datetimeFigureOut">
               <a:rPr lang="en-US" smtClean="0"/>
-              <a:t>1/29/26</a:t>
+              <a:t>2/5/26</a:t>
             </a:fld>
             <a:endParaRPr lang="en-US" dirty="0"/>
           </a:p>
@@ -7557,7 +7557,7 @@
           <a:p>
             <a:fld id="{48A87A34-81AB-432B-8DAE-1953F412C126}" type="datetimeFigureOut">
               <a:rPr lang="en-US" smtClean="0"/>
-              <a:t>1/29/26</a:t>
+              <a:t>2/5/26</a:t>
             </a:fld>
             <a:endParaRPr lang="en-US" dirty="0"/>
           </a:p>
@@ -7973,7 +7973,7 @@
             <a:fld id="{48A87A34-81AB-432B-8DAE-1953F412C126}" type="datetimeFigureOut">
               <a:rPr lang="en-US" smtClean="0"/>
               <a:pPr/>
-              <a:t>1/29/26</a:t>
+              <a:t>2/5/26</a:t>
             </a:fld>
             <a:endParaRPr lang="en-US" dirty="0"/>
           </a:p>
@@ -8224,7 +8224,7 @@
             <a:fld id="{48A87A34-81AB-432B-8DAE-1953F412C126}" type="datetimeFigureOut">
               <a:rPr lang="en-US" smtClean="0"/>
               <a:pPr/>
-              <a:t>1/29/26</a:t>
+              <a:t>2/5/26</a:t>
             </a:fld>
             <a:endParaRPr lang="en-US" dirty="0"/>
           </a:p>
@@ -8873,10 +8873,16 @@
               <a:defRPr/>
             </a:pPr>
             <a:r>
+              <a:rPr kumimoji="1" lang="en-US" sz="3200">
+                <a:cs typeface="+mn-cs"/>
+              </a:rPr>
+              <a:t>Topic </a:t>
+            </a:r>
+            <a:r>
               <a:rPr kumimoji="1" lang="en-US" sz="3200" dirty="0">
                 <a:cs typeface="+mn-cs"/>
               </a:rPr>
-              <a:t>Chapter 4.3 – First Class Functions</a:t>
+              <a:t>4.3 – First Class Functions</a:t>
             </a:r>
           </a:p>
         </p:txBody>
@@ -20973,7 +20979,21 @@
                 <a:ea typeface="+mj-ea"/>
                 <a:cs typeface="ＭＳ Ｐゴシック" pitchFamily="-1" charset="-128"/>
               </a:rPr>
-              <a:t>First Class  Functions. example</a:t>
+              <a:t>First Class  Functions - </a:t>
+            </a:r>
+            <a:r>
+              <a:rPr kumimoji="1" lang="en-US" sz="3200" b="1" dirty="0">
+                <a:cs typeface="ＭＳ Ｐゴシック" pitchFamily="-1" charset="-128"/>
+              </a:rPr>
+              <a:t>E</a:t>
+            </a:r>
+            <a:r>
+              <a:rPr kumimoji="1" lang="en-US" sz="3200" b="1" dirty="0">
+                <a:latin typeface="+mj-lt"/>
+                <a:ea typeface="+mj-ea"/>
+                <a:cs typeface="ＭＳ Ｐゴシック" pitchFamily="-1" charset="-128"/>
+              </a:rPr>
+              <a:t>xample</a:t>
             </a:r>
           </a:p>
         </p:txBody>
